--- a/curso/pptx/S87.pptx
+++ b/curso/pptx/S87.pptx
@@ -7096,7 +7096,7 @@
                 </a:solidFill>
                 <a:latin typeface="Nunito Sans"/>
               </a:rPr>
-              <a:t>No solo ropa: música, bailes, palabras, apps, cortes de pelo</a:t>
+              <a:t>不只是衣服：还有音乐、舞蹈、词语、应用程序、发型</a:t>
             </a:r>
           </a:p>
           <a:p>
@@ -7121,7 +7121,7 @@
                 </a:solidFill>
                 <a:latin typeface="Nunito Sans"/>
               </a:rPr>
-              <a:t>Dura un tiempo: lo que hoy se lleva, mañana «ya no»</a:t>
+              <a:t>它只持续一段时间：今天流行的，明天就“不流行了”</a:t>
             </a:r>
           </a:p>
           <a:p>
@@ -7146,7 +7146,7 @@
                 </a:solidFill>
                 <a:latin typeface="Nunito Sans"/>
               </a:rPr>
-              <a:t>Dice algo de ti: es una </a:t>
+              <a:t>它说明了你的一些东西：它是认同的一种</a:t>
             </a:r>
             <a:r>
               <a:rPr sz="2800" b="1">
@@ -7155,7 +7155,32 @@
                 </a:solidFill>
                 <a:latin typeface="Nunito Sans"/>
               </a:rPr>
-              <a:t>señal</a:t>
+              <a:t>信号</a:t>
+            </a:r>
+          </a:p>
+          <a:p>
+            <a:pPr>
+              <a:spcAft>
+                <a:spcPts val="1260"/>
+              </a:spcAft>
+            </a:pPr>
+            <a:r>
+              <a:rPr sz="2800" b="1">
+                <a:solidFill>
+                  <a:srgbClr val="E8793A"/>
+                </a:solidFill>
+                <a:latin typeface="Nunito Sans"/>
+              </a:rPr>
+              <a:t>• </a:t>
+            </a:r>
+            <a:r>
+              <a:rPr sz="2800" b="1">
+                <a:solidFill>
+                  <a:srgbClr val="1F2A44"/>
+                </a:solidFill>
+                <a:latin typeface="Nunito Sans"/>
+              </a:rPr>
+              <a:t>认同：</a:t>
             </a:r>
             <a:r>
               <a:rPr sz="2800" b="0">
@@ -7164,41 +7189,7 @@
                 </a:solidFill>
                 <a:latin typeface="Nunito Sans"/>
               </a:rPr>
-              <a:t> de identidad</a:t>
-            </a:r>
-          </a:p>
-          <a:p>
-            <a:pPr>
-              <a:spcAft>
-                <a:spcPts val="1260"/>
-              </a:spcAft>
-            </a:pPr>
-            <a:r>
-              <a:rPr sz="2800" b="1">
-                <a:solidFill>
-                  <a:srgbClr val="E8793A"/>
-                </a:solidFill>
-                <a:latin typeface="Nunito Sans"/>
-              </a:rPr>
-              <a:t>• </a:t>
-            </a:r>
-            <a:r>
-              <a:rPr sz="2800" b="1">
-                <a:solidFill>
-                  <a:srgbClr val="1F2A44"/>
-                </a:solidFill>
-                <a:latin typeface="Nunito Sans"/>
-              </a:rPr>
-              <a:t>Identidad:</a:t>
-            </a:r>
-            <a:r>
-              <a:rPr sz="2800" b="0">
-                <a:solidFill>
-                  <a:srgbClr val="1F2A44"/>
-                </a:solidFill>
-                <a:latin typeface="Nunito Sans"/>
-              </a:rPr>
-              <a:t> quién eres y de qué grupos te sientes parte</a:t>
+              <a:t>你是谁，你觉得自己属于哪些群体</a:t>
             </a:r>
           </a:p>
         </p:txBody>
@@ -7432,7 +7423,7 @@
                 </a:solidFill>
                 <a:latin typeface="Nunito Sans"/>
               </a:rPr>
-              <a:t>Pertenecer:</a:t>
+              <a:t>归属：</a:t>
             </a:r>
             <a:r>
               <a:rPr sz="2800" b="0">
@@ -7441,7 +7432,7 @@
                 </a:solidFill>
                 <a:latin typeface="Nunito Sans"/>
               </a:rPr>
-              <a:t> vestir como mi cuadrilla para ser «de los nuestros»</a:t>
+              <a:t>穿得和我的朋友圈一样，成为“自己人”</a:t>
             </a:r>
           </a:p>
           <a:p>
@@ -7466,7 +7457,7 @@
                 </a:solidFill>
                 <a:latin typeface="Nunito Sans"/>
               </a:rPr>
-              <a:t>Distinguirse:</a:t>
+              <a:t>与众不同：</a:t>
             </a:r>
             <a:r>
               <a:rPr sz="2800" b="0">
@@ -7475,7 +7466,7 @@
                 </a:solidFill>
                 <a:latin typeface="Nunito Sans"/>
               </a:rPr>
-              <a:t> ser diferente de otros grupos o del resto</a:t>
+              <a:t>与其他群体或其余的人不一样</a:t>
             </a:r>
           </a:p>
           <a:p>
@@ -7500,7 +7491,7 @@
                 </a:solidFill>
                 <a:latin typeface="Nunito Sans"/>
               </a:rPr>
-              <a:t>Cuando todos la llevan, ya no distingue… y llega otra moda</a:t>
+              <a:t>当人人都穿时，它就不再能区分了……于是又出现了另一种潮流</a:t>
             </a:r>
           </a:p>
         </p:txBody>
@@ -7691,7 +7682,7 @@
                 </a:solidFill>
                 <a:latin typeface="Nunito Sans"/>
               </a:rPr>
-              <a:t>Burlas</a:t>
+              <a:t>嘲笑</a:t>
             </a:r>
             <a:r>
               <a:rPr sz="2800" b="0">
@@ -7700,7 +7691,7 @@
                 </a:solidFill>
                 <a:latin typeface="Nunito Sans"/>
               </a:rPr>
-              <a:t> a quien no lleva la marca o el estilo «que toca»</a:t>
+              <a:t>没有穿“该穿的”品牌或风格的人</a:t>
             </a:r>
           </a:p>
           <a:p>
@@ -7725,7 +7716,7 @@
                 </a:solidFill>
                 <a:latin typeface="Nunito Sans"/>
               </a:rPr>
-              <a:t>Gasto:</a:t>
+              <a:t>花销：</a:t>
             </a:r>
             <a:r>
               <a:rPr sz="2800" b="0">
@@ -7734,7 +7725,7 @@
                 </a:solidFill>
                 <a:latin typeface="Nunito Sans"/>
               </a:rPr>
-              <a:t> pedir lo que la familia no puede pagar</a:t>
+              <a:t>要求家里付不起的东西</a:t>
             </a:r>
           </a:p>
           <a:p>
@@ -7753,13 +7744,22 @@
               <a:t>• </a:t>
             </a:r>
             <a:r>
+              <a:rPr sz="2800" b="0">
+                <a:solidFill>
+                  <a:srgbClr val="1F2A44"/>
+                </a:solidFill>
+                <a:latin typeface="Nunito Sans"/>
+              </a:rPr>
+              <a:t>照片和广告里</a:t>
+            </a:r>
+            <a:r>
               <a:rPr sz="2800" b="1">
                 <a:solidFill>
                   <a:srgbClr val="1F2A44"/>
                 </a:solidFill>
                 <a:latin typeface="Nunito Sans"/>
               </a:rPr>
-              <a:t>Cuerpos retocados</a:t>
+              <a:t>修过的身体</a:t>
             </a:r>
             <a:r>
               <a:rPr sz="2800" b="0">
@@ -7768,7 +7768,7 @@
                 </a:solidFill>
                 <a:latin typeface="Nunito Sans"/>
               </a:rPr>
-              <a:t> en fotos y anuncios: nadie es así de verdad</a:t>
+              <a:t>：没有人真的是那样</a:t>
             </a:r>
           </a:p>
           <a:p>
@@ -7793,7 +7793,7 @@
                 </a:solidFill>
                 <a:latin typeface="Nunito Sans"/>
               </a:rPr>
-              <a:t>Roles:</a:t>
+              <a:t>角色：</a:t>
             </a:r>
             <a:r>
               <a:rPr sz="2800" b="0">
@@ -7802,7 +7802,7 @@
                 </a:solidFill>
                 <a:latin typeface="Nunito Sans"/>
               </a:rPr>
-              <a:t> «esto es de chicos», «esto es de chicas»</a:t>
+              <a:t>“这是男生的”“这是女生的”</a:t>
             </a:r>
           </a:p>
           <a:p>
@@ -7827,7 +7827,7 @@
                 </a:solidFill>
                 <a:latin typeface="Nunito Sans"/>
               </a:rPr>
-              <a:t>Publicidad e influencers también empujan: lo vimos en las sesiones 50 y 51</a:t>
+              <a:t>广告和网红也在推动：我们在第50课和第51课看过</a:t>
             </a:r>
           </a:p>
         </p:txBody>

--- a/curso/pptx/S87.pptx
+++ b/curso/pptx/S87.pptx
@@ -4128,7 +4128,7 @@
                 </a:solidFill>
                 <a:latin typeface="Nunito Sans"/>
               </a:rPr>
-              <a:t>Leire 的整个朋友圈都穿同一件卫衣。Leire 并不特别喜欢，但她在生日时要了一件。（虚构的例子。）</a:t>
+              <a:t>一个女孩的整个朋友圈都穿同一件卫衣。这个女孩并不特别喜欢，但她在生日时要了一件。（虚构的例子。）</a:t>
             </a:r>
           </a:p>
         </p:txBody>
@@ -4455,7 +4455,7 @@
                 </a:solidFill>
                 <a:latin typeface="Nunito Sans"/>
               </a:rPr>
-              <a:t>Dylan 要穿一双流行的运动鞋去参加学校的跑步比赛：“人人都穿，所以一定是跑步最好的。”</a:t>
+              <a:t>一个男孩要穿一双流行的运动鞋去参加学校的跑步比赛：“人人都穿，所以一定是跑步最好的。”</a:t>
             </a:r>
           </a:p>
         </p:txBody>
@@ -4818,7 +4818,7 @@
                 </a:solidFill>
                 <a:latin typeface="Nunito Sans"/>
               </a:rPr>
-              <a:t>Kevin 说：“粉色一直是女生的，蓝色是男生的。这是自然的。”</a:t>
+              <a:t>一个男孩说：“粉色一直是女生的，蓝色是男生的。这是自然的。”</a:t>
             </a:r>
           </a:p>
         </p:txBody>
@@ -5145,7 +5145,7 @@
                 </a:solidFill>
                 <a:latin typeface="Nunito Sans"/>
               </a:rPr>
-              <a:t>Aitor 总是穿黑色，就像他最喜欢的乐队的粉丝一样。“我不追随潮流：追随潮流的人都是盲从的羊，”他说。（虚构的例子。）</a:t>
+              <a:t>一个男孩总是穿黑色，就像他最喜欢的乐队的粉丝一样。“我不追随潮流：追随潮流的人都是盲从的羊，”他说。（虚构的例子。）</a:t>
             </a:r>
           </a:p>
         </p:txBody>
@@ -5193,7 +5193,7 @@
                 </a:solidFill>
                 <a:latin typeface="Nunito Sans"/>
               </a:rPr>
-              <a:t>Aitor 是不是置身于潮流之外？</a:t>
+              <a:t>这个男孩是不是置身于潮流之外？</a:t>
             </a:r>
           </a:p>
           <a:p>
